--- a/chapter6/parts/part-07-eda-workflow-and-tools/clip.pptx
+++ b/chapter6/parts/part-07-eda-workflow-and-tools/clip.pptx
@@ -4242,7 +4242,7 @@
               </a:defRPr>
             </a:pPr>
             <a:r>
-              <a:t>Chapter 6 — 07 Eda Workflow And Tools</a:t>
+              <a:t>Chapter 6 — Eda Workflow And Tools</a:t>
             </a:r>
           </a:p>
         </p:txBody>
@@ -4401,7 +4401,7 @@
               </a:defRPr>
             </a:pPr>
             <a:r>
-              <a:t>Chapter 6 — 07 Eda Workflow And Tools</a:t>
+              <a:t>Chapter 6 — Eda Workflow And Tools</a:t>
             </a:r>
           </a:p>
         </p:txBody>
@@ -4540,7 +4540,7 @@
               </a:defRPr>
             </a:pPr>
             <a:r>
-              <a:t>Chapter 6 — 07 Eda Workflow And Tools</a:t>
+              <a:t>Chapter 6 — Eda Workflow And Tools</a:t>
             </a:r>
           </a:p>
         </p:txBody>
@@ -4719,7 +4719,7 @@
               </a:defRPr>
             </a:pPr>
             <a:r>
-              <a:t>Chapter 6 — 07 Eda Workflow And Tools</a:t>
+              <a:t>Chapter 6 — Eda Workflow And Tools</a:t>
             </a:r>
           </a:p>
         </p:txBody>
@@ -4878,7 +4878,7 @@
               </a:defRPr>
             </a:pPr>
             <a:r>
-              <a:t>Chapter 6 — 07 Eda Workflow And Tools</a:t>
+              <a:t>Chapter 6 — Eda Workflow And Tools</a:t>
             </a:r>
           </a:p>
         </p:txBody>
@@ -5037,7 +5037,7 @@
               </a:defRPr>
             </a:pPr>
             <a:r>
-              <a:t>Chapter 6 — 07 Eda Workflow And Tools</a:t>
+              <a:t>Chapter 6 — Eda Workflow And Tools</a:t>
             </a:r>
           </a:p>
         </p:txBody>
@@ -5196,7 +5196,7 @@
               </a:defRPr>
             </a:pPr>
             <a:r>
-              <a:t>Chapter 6 — 07 Eda Workflow And Tools</a:t>
+              <a:t>Chapter 6 — Eda Workflow And Tools</a:t>
             </a:r>
           </a:p>
         </p:txBody>
@@ -5375,7 +5375,7 @@
               </a:defRPr>
             </a:pPr>
             <a:r>
-              <a:t>Chapter 6 — 07 Eda Workflow And Tools</a:t>
+              <a:t>Chapter 6 — Eda Workflow And Tools</a:t>
             </a:r>
           </a:p>
         </p:txBody>
@@ -5534,7 +5534,7 @@
               </a:defRPr>
             </a:pPr>
             <a:r>
-              <a:t>Chapter 6 — 07 Eda Workflow And Tools</a:t>
+              <a:t>Chapter 6 — Eda Workflow And Tools</a:t>
             </a:r>
           </a:p>
         </p:txBody>
@@ -5713,7 +5713,7 @@
               </a:defRPr>
             </a:pPr>
             <a:r>
-              <a:t>Chapter 6 — 07 Eda Workflow And Tools</a:t>
+              <a:t>Chapter 6 — Eda Workflow And Tools</a:t>
             </a:r>
           </a:p>
         </p:txBody>

--- a/chapter6/parts/part-07-eda-workflow-and-tools/clip.pptx
+++ b/chapter6/parts/part-07-eda-workflow-and-tools/clip.pptx
@@ -4326,10 +4326,12 @@
           </a:bodyPr>
           <a:lstStyle/>
           <a:p>
-            <a:pPr>
+            <a:pPr lvl="0" marL="457200" indent="-228600">
+              <a:buFont typeface="Calibri"/>
               <a:spcAft>
                 <a:spcPts val="1000"/>
               </a:spcAft>
+              <a:buSzPct val="100000"/>
               <a:buChar char="•"/>
               <a:lnSpc>
                 <a:spcPts val="2200"/>
@@ -4346,10 +4348,12 @@
             </a:r>
           </a:p>
           <a:p>
-            <a:pPr>
+            <a:pPr lvl="0" marL="457200" indent="-228600">
+              <a:buFont typeface="Calibri"/>
               <a:spcAft>
                 <a:spcPts val="1000"/>
               </a:spcAft>
+              <a:buSzPct val="100000"/>
               <a:buChar char="•"/>
               <a:lnSpc>
                 <a:spcPts val="2200"/>
@@ -4485,10 +4489,12 @@
           </a:bodyPr>
           <a:lstStyle/>
           <a:p>
-            <a:pPr>
+            <a:pPr lvl="0" marL="457200" indent="-228600">
+              <a:buFont typeface="Calibri"/>
               <a:spcAft>
                 <a:spcPts val="1000"/>
               </a:spcAft>
+              <a:buSzPct val="100000"/>
               <a:buChar char="•"/>
               <a:lnSpc>
                 <a:spcPts val="2200"/>
@@ -4624,10 +4630,12 @@
           </a:bodyPr>
           <a:lstStyle/>
           <a:p>
-            <a:pPr>
+            <a:pPr lvl="0" marL="457200" indent="-228600">
+              <a:buFont typeface="Calibri"/>
               <a:spcAft>
                 <a:spcPts val="1000"/>
               </a:spcAft>
+              <a:buSzPct val="100000"/>
               <a:buChar char="•"/>
               <a:lnSpc>
                 <a:spcPts val="2200"/>
@@ -4644,10 +4652,12 @@
             </a:r>
           </a:p>
           <a:p>
-            <a:pPr>
+            <a:pPr lvl="0" marL="457200" indent="-228600">
+              <a:buFont typeface="Calibri"/>
               <a:spcAft>
                 <a:spcPts val="1000"/>
               </a:spcAft>
+              <a:buSzPct val="100000"/>
               <a:buChar char="•"/>
               <a:lnSpc>
                 <a:spcPts val="2200"/>
@@ -4664,10 +4674,12 @@
             </a:r>
           </a:p>
           <a:p>
-            <a:pPr>
+            <a:pPr lvl="0" marL="457200" indent="-228600">
+              <a:buFont typeface="Calibri"/>
               <a:spcAft>
                 <a:spcPts val="1000"/>
               </a:spcAft>
+              <a:buSzPct val="100000"/>
               <a:buChar char="•"/>
               <a:lnSpc>
                 <a:spcPts val="2200"/>
@@ -4803,10 +4815,12 @@
           </a:bodyPr>
           <a:lstStyle/>
           <a:p>
-            <a:pPr>
+            <a:pPr lvl="0" marL="457200" indent="-228600">
+              <a:buFont typeface="Calibri"/>
               <a:spcAft>
                 <a:spcPts val="1000"/>
               </a:spcAft>
+              <a:buSzPct val="100000"/>
               <a:buChar char="•"/>
               <a:lnSpc>
                 <a:spcPts val="2200"/>
@@ -4823,10 +4837,12 @@
             </a:r>
           </a:p>
           <a:p>
-            <a:pPr>
+            <a:pPr lvl="0" marL="457200" indent="-228600">
+              <a:buFont typeface="Calibri"/>
               <a:spcAft>
                 <a:spcPts val="1000"/>
               </a:spcAft>
+              <a:buSzPct val="100000"/>
               <a:buChar char="•"/>
               <a:lnSpc>
                 <a:spcPts val="2200"/>
@@ -4962,10 +4978,12 @@
           </a:bodyPr>
           <a:lstStyle/>
           <a:p>
-            <a:pPr>
+            <a:pPr lvl="0" marL="457200" indent="-228600">
+              <a:buFont typeface="Calibri"/>
               <a:spcAft>
                 <a:spcPts val="1000"/>
               </a:spcAft>
+              <a:buSzPct val="100000"/>
               <a:buChar char="•"/>
               <a:lnSpc>
                 <a:spcPts val="2200"/>
@@ -4982,10 +5000,12 @@
             </a:r>
           </a:p>
           <a:p>
-            <a:pPr>
+            <a:pPr lvl="0" marL="457200" indent="-228600">
+              <a:buFont typeface="Calibri"/>
               <a:spcAft>
                 <a:spcPts val="1000"/>
               </a:spcAft>
+              <a:buSzPct val="100000"/>
               <a:buChar char="•"/>
               <a:lnSpc>
                 <a:spcPts val="2200"/>
@@ -5121,10 +5141,12 @@
           </a:bodyPr>
           <a:lstStyle/>
           <a:p>
-            <a:pPr>
+            <a:pPr lvl="0" marL="457200" indent="-228600">
+              <a:buFont typeface="Calibri"/>
               <a:spcAft>
                 <a:spcPts val="1000"/>
               </a:spcAft>
+              <a:buSzPct val="100000"/>
               <a:buChar char="•"/>
               <a:lnSpc>
                 <a:spcPts val="2200"/>
@@ -5141,10 +5163,12 @@
             </a:r>
           </a:p>
           <a:p>
-            <a:pPr>
+            <a:pPr lvl="0" marL="457200" indent="-228600">
+              <a:buFont typeface="Calibri"/>
               <a:spcAft>
                 <a:spcPts val="1000"/>
               </a:spcAft>
+              <a:buSzPct val="100000"/>
               <a:buChar char="•"/>
               <a:lnSpc>
                 <a:spcPts val="2200"/>
@@ -5280,10 +5304,12 @@
           </a:bodyPr>
           <a:lstStyle/>
           <a:p>
-            <a:pPr>
+            <a:pPr lvl="0" marL="457200" indent="-228600">
+              <a:buFont typeface="Calibri"/>
               <a:spcAft>
                 <a:spcPts val="1000"/>
               </a:spcAft>
+              <a:buSzPct val="100000"/>
               <a:buChar char="•"/>
               <a:lnSpc>
                 <a:spcPts val="2200"/>
@@ -5300,10 +5326,12 @@
             </a:r>
           </a:p>
           <a:p>
-            <a:pPr>
+            <a:pPr lvl="0" marL="457200" indent="-228600">
+              <a:buFont typeface="Calibri"/>
               <a:spcAft>
                 <a:spcPts val="1000"/>
               </a:spcAft>
+              <a:buSzPct val="100000"/>
               <a:buChar char="•"/>
               <a:lnSpc>
                 <a:spcPts val="2200"/>
@@ -5320,10 +5348,12 @@
             </a:r>
           </a:p>
           <a:p>
-            <a:pPr>
+            <a:pPr lvl="0" marL="457200" indent="-228600">
+              <a:buFont typeface="Calibri"/>
               <a:spcAft>
                 <a:spcPts val="1000"/>
               </a:spcAft>
+              <a:buSzPct val="100000"/>
               <a:buChar char="•"/>
               <a:lnSpc>
                 <a:spcPts val="2200"/>
@@ -5459,10 +5489,12 @@
           </a:bodyPr>
           <a:lstStyle/>
           <a:p>
-            <a:pPr>
+            <a:pPr lvl="0" marL="457200" indent="-228600">
+              <a:buFont typeface="Calibri"/>
               <a:spcAft>
                 <a:spcPts val="1000"/>
               </a:spcAft>
+              <a:buSzPct val="100000"/>
               <a:buChar char="•"/>
               <a:lnSpc>
                 <a:spcPts val="2200"/>
@@ -5479,10 +5511,12 @@
             </a:r>
           </a:p>
           <a:p>
-            <a:pPr>
+            <a:pPr lvl="0" marL="457200" indent="-228600">
+              <a:buFont typeface="Calibri"/>
               <a:spcAft>
                 <a:spcPts val="1000"/>
               </a:spcAft>
+              <a:buSzPct val="100000"/>
               <a:buChar char="•"/>
               <a:lnSpc>
                 <a:spcPts val="2200"/>
@@ -5618,10 +5652,12 @@
           </a:bodyPr>
           <a:lstStyle/>
           <a:p>
-            <a:pPr>
+            <a:pPr lvl="0" marL="457200" indent="-228600">
+              <a:buFont typeface="Calibri"/>
               <a:spcAft>
                 <a:spcPts val="1000"/>
               </a:spcAft>
+              <a:buSzPct val="100000"/>
               <a:buChar char="•"/>
               <a:lnSpc>
                 <a:spcPts val="2200"/>
@@ -5638,10 +5674,12 @@
             </a:r>
           </a:p>
           <a:p>
-            <a:pPr>
+            <a:pPr lvl="0" marL="457200" indent="-228600">
+              <a:buFont typeface="Calibri"/>
               <a:spcAft>
                 <a:spcPts val="1000"/>
               </a:spcAft>
+              <a:buSzPct val="100000"/>
               <a:buChar char="•"/>
               <a:lnSpc>
                 <a:spcPts val="2200"/>
@@ -5658,10 +5696,12 @@
             </a:r>
           </a:p>
           <a:p>
-            <a:pPr>
+            <a:pPr lvl="0" marL="457200" indent="-228600">
+              <a:buFont typeface="Calibri"/>
               <a:spcAft>
                 <a:spcPts val="1000"/>
               </a:spcAft>
+              <a:buSzPct val="100000"/>
               <a:buChar char="•"/>
               <a:lnSpc>
                 <a:spcPts val="2200"/>
